--- a/充滿我.pptx
+++ b/充滿我.pptx
@@ -165,10 +165,9 @@
           <a:lstStyle/>
           <a:p>
             <a:r>
-              <a:rPr lang="zh-TW" altLang="en-US" smtClean="0"/>
+              <a:rPr lang="zh-TW" altLang="en-US"/>
               <a:t>按一下以編輯母片標題樣式</a:t>
             </a:r>
-            <a:endParaRPr lang="zh-TW" altLang="en-US"/>
           </a:p>
         </p:txBody>
       </p:sp>
@@ -284,10 +283,9 @@
           </a:lstStyle>
           <a:p>
             <a:r>
-              <a:rPr lang="zh-TW" altLang="en-US" smtClean="0"/>
+              <a:rPr lang="zh-TW" altLang="en-US"/>
               <a:t>按一下以編輯母片副標題樣式</a:t>
             </a:r>
-            <a:endParaRPr lang="zh-TW" altLang="en-US"/>
           </a:p>
         </p:txBody>
       </p:sp>
@@ -309,7 +307,7 @@
             <a:fld id="{ABF365F4-0254-40A2-88B3-76823A851626}" type="datetimeFigureOut">
               <a:rPr lang="zh-TW" altLang="en-US" smtClean="0"/>
               <a:pPr/>
-              <a:t>2023/5/20</a:t>
+              <a:t>2025/8/2</a:t>
             </a:fld>
             <a:endParaRPr lang="zh-TW" altLang="en-US"/>
           </a:p>
@@ -399,10 +397,9 @@
           <a:lstStyle/>
           <a:p>
             <a:r>
-              <a:rPr lang="zh-TW" altLang="en-US" smtClean="0"/>
+              <a:rPr lang="zh-TW" altLang="en-US"/>
               <a:t>按一下以編輯母片標題樣式</a:t>
             </a:r>
-            <a:endParaRPr lang="zh-TW" altLang="en-US"/>
           </a:p>
         </p:txBody>
       </p:sp>
@@ -423,38 +420,37 @@
           <a:p>
             <a:pPr lvl="0"/>
             <a:r>
-              <a:rPr lang="zh-TW" altLang="en-US" smtClean="0"/>
+              <a:rPr lang="zh-TW" altLang="en-US"/>
               <a:t>按一下以編輯母片文字樣式</a:t>
             </a:r>
           </a:p>
           <a:p>
             <a:pPr lvl="1"/>
             <a:r>
-              <a:rPr lang="zh-TW" altLang="en-US" smtClean="0"/>
+              <a:rPr lang="zh-TW" altLang="en-US"/>
               <a:t>第二層</a:t>
             </a:r>
           </a:p>
           <a:p>
             <a:pPr lvl="2"/>
             <a:r>
-              <a:rPr lang="zh-TW" altLang="en-US" smtClean="0"/>
+              <a:rPr lang="zh-TW" altLang="en-US"/>
               <a:t>第三層</a:t>
             </a:r>
           </a:p>
           <a:p>
             <a:pPr lvl="3"/>
             <a:r>
-              <a:rPr lang="zh-TW" altLang="en-US" smtClean="0"/>
+              <a:rPr lang="zh-TW" altLang="en-US"/>
               <a:t>第四層</a:t>
             </a:r>
           </a:p>
           <a:p>
             <a:pPr lvl="4"/>
             <a:r>
-              <a:rPr lang="zh-TW" altLang="en-US" smtClean="0"/>
+              <a:rPr lang="zh-TW" altLang="en-US"/>
               <a:t>第五層</a:t>
             </a:r>
-            <a:endParaRPr lang="zh-TW" altLang="en-US"/>
           </a:p>
         </p:txBody>
       </p:sp>
@@ -476,7 +472,7 @@
             <a:fld id="{ABF365F4-0254-40A2-88B3-76823A851626}" type="datetimeFigureOut">
               <a:rPr lang="zh-TW" altLang="en-US" smtClean="0"/>
               <a:pPr/>
-              <a:t>2023/5/20</a:t>
+              <a:t>2025/8/2</a:t>
             </a:fld>
             <a:endParaRPr lang="zh-TW" altLang="en-US"/>
           </a:p>
@@ -571,10 +567,9 @@
           <a:lstStyle/>
           <a:p>
             <a:r>
-              <a:rPr lang="zh-TW" altLang="en-US" smtClean="0"/>
+              <a:rPr lang="zh-TW" altLang="en-US"/>
               <a:t>按一下以編輯母片標題樣式</a:t>
             </a:r>
-            <a:endParaRPr lang="zh-TW" altLang="en-US"/>
           </a:p>
         </p:txBody>
       </p:sp>
@@ -600,38 +595,37 @@
           <a:p>
             <a:pPr lvl="0"/>
             <a:r>
-              <a:rPr lang="zh-TW" altLang="en-US" smtClean="0"/>
+              <a:rPr lang="zh-TW" altLang="en-US"/>
               <a:t>按一下以編輯母片文字樣式</a:t>
             </a:r>
           </a:p>
           <a:p>
             <a:pPr lvl="1"/>
             <a:r>
-              <a:rPr lang="zh-TW" altLang="en-US" smtClean="0"/>
+              <a:rPr lang="zh-TW" altLang="en-US"/>
               <a:t>第二層</a:t>
             </a:r>
           </a:p>
           <a:p>
             <a:pPr lvl="2"/>
             <a:r>
-              <a:rPr lang="zh-TW" altLang="en-US" smtClean="0"/>
+              <a:rPr lang="zh-TW" altLang="en-US"/>
               <a:t>第三層</a:t>
             </a:r>
           </a:p>
           <a:p>
             <a:pPr lvl="3"/>
             <a:r>
-              <a:rPr lang="zh-TW" altLang="en-US" smtClean="0"/>
+              <a:rPr lang="zh-TW" altLang="en-US"/>
               <a:t>第四層</a:t>
             </a:r>
           </a:p>
           <a:p>
             <a:pPr lvl="4"/>
             <a:r>
-              <a:rPr lang="zh-TW" altLang="en-US" smtClean="0"/>
+              <a:rPr lang="zh-TW" altLang="en-US"/>
               <a:t>第五層</a:t>
             </a:r>
-            <a:endParaRPr lang="zh-TW" altLang="en-US"/>
           </a:p>
         </p:txBody>
       </p:sp>
@@ -653,7 +647,7 @@
             <a:fld id="{ABF365F4-0254-40A2-88B3-76823A851626}" type="datetimeFigureOut">
               <a:rPr lang="zh-TW" altLang="en-US" smtClean="0"/>
               <a:pPr/>
-              <a:t>2023/5/20</a:t>
+              <a:t>2025/8/2</a:t>
             </a:fld>
             <a:endParaRPr lang="zh-TW" altLang="en-US"/>
           </a:p>
@@ -743,10 +737,9 @@
           <a:lstStyle/>
           <a:p>
             <a:r>
-              <a:rPr lang="zh-TW" altLang="en-US" smtClean="0"/>
+              <a:rPr lang="zh-TW" altLang="en-US"/>
               <a:t>按一下以編輯母片標題樣式</a:t>
             </a:r>
-            <a:endParaRPr lang="zh-TW" altLang="en-US"/>
           </a:p>
         </p:txBody>
       </p:sp>
@@ -767,38 +760,37 @@
           <a:p>
             <a:pPr lvl="0"/>
             <a:r>
-              <a:rPr lang="zh-TW" altLang="en-US" smtClean="0"/>
+              <a:rPr lang="zh-TW" altLang="en-US"/>
               <a:t>按一下以編輯母片文字樣式</a:t>
             </a:r>
           </a:p>
           <a:p>
             <a:pPr lvl="1"/>
             <a:r>
-              <a:rPr lang="zh-TW" altLang="en-US" smtClean="0"/>
+              <a:rPr lang="zh-TW" altLang="en-US"/>
               <a:t>第二層</a:t>
             </a:r>
           </a:p>
           <a:p>
             <a:pPr lvl="2"/>
             <a:r>
-              <a:rPr lang="zh-TW" altLang="en-US" smtClean="0"/>
+              <a:rPr lang="zh-TW" altLang="en-US"/>
               <a:t>第三層</a:t>
             </a:r>
           </a:p>
           <a:p>
             <a:pPr lvl="3"/>
             <a:r>
-              <a:rPr lang="zh-TW" altLang="en-US" smtClean="0"/>
+              <a:rPr lang="zh-TW" altLang="en-US"/>
               <a:t>第四層</a:t>
             </a:r>
           </a:p>
           <a:p>
             <a:pPr lvl="4"/>
             <a:r>
-              <a:rPr lang="zh-TW" altLang="en-US" smtClean="0"/>
+              <a:rPr lang="zh-TW" altLang="en-US"/>
               <a:t>第五層</a:t>
             </a:r>
-            <a:endParaRPr lang="zh-TW" altLang="en-US"/>
           </a:p>
         </p:txBody>
       </p:sp>
@@ -820,7 +812,7 @@
             <a:fld id="{ABF365F4-0254-40A2-88B3-76823A851626}" type="datetimeFigureOut">
               <a:rPr lang="zh-TW" altLang="en-US" smtClean="0"/>
               <a:pPr/>
-              <a:t>2023/5/20</a:t>
+              <a:t>2025/8/2</a:t>
             </a:fld>
             <a:endParaRPr lang="zh-TW" altLang="en-US"/>
           </a:p>
@@ -919,10 +911,9 @@
           </a:lstStyle>
           <a:p>
             <a:r>
-              <a:rPr lang="zh-TW" altLang="en-US" smtClean="0"/>
+              <a:rPr lang="zh-TW" altLang="en-US"/>
               <a:t>按一下以編輯母片標題樣式</a:t>
             </a:r>
-            <a:endParaRPr lang="zh-TW" altLang="en-US"/>
           </a:p>
         </p:txBody>
       </p:sp>
@@ -1039,7 +1030,7 @@
           <a:p>
             <a:pPr lvl="0"/>
             <a:r>
-              <a:rPr lang="zh-TW" altLang="en-US" smtClean="0"/>
+              <a:rPr lang="zh-TW" altLang="en-US"/>
               <a:t>按一下以編輯母片文字樣式</a:t>
             </a:r>
           </a:p>
@@ -1063,7 +1054,7 @@
             <a:fld id="{ABF365F4-0254-40A2-88B3-76823A851626}" type="datetimeFigureOut">
               <a:rPr lang="zh-TW" altLang="en-US" smtClean="0"/>
               <a:pPr/>
-              <a:t>2023/5/20</a:t>
+              <a:t>2025/8/2</a:t>
             </a:fld>
             <a:endParaRPr lang="zh-TW" altLang="en-US"/>
           </a:p>
@@ -1153,10 +1144,9 @@
           <a:lstStyle/>
           <a:p>
             <a:r>
-              <a:rPr lang="zh-TW" altLang="en-US" smtClean="0"/>
+              <a:rPr lang="zh-TW" altLang="en-US"/>
               <a:t>按一下以編輯母片標題樣式</a:t>
             </a:r>
-            <a:endParaRPr lang="zh-TW" altLang="en-US"/>
           </a:p>
         </p:txBody>
       </p:sp>
@@ -1210,38 +1200,37 @@
           <a:p>
             <a:pPr lvl="0"/>
             <a:r>
-              <a:rPr lang="zh-TW" altLang="en-US" smtClean="0"/>
+              <a:rPr lang="zh-TW" altLang="en-US"/>
               <a:t>按一下以編輯母片文字樣式</a:t>
             </a:r>
           </a:p>
           <a:p>
             <a:pPr lvl="1"/>
             <a:r>
-              <a:rPr lang="zh-TW" altLang="en-US" smtClean="0"/>
+              <a:rPr lang="zh-TW" altLang="en-US"/>
               <a:t>第二層</a:t>
             </a:r>
           </a:p>
           <a:p>
             <a:pPr lvl="2"/>
             <a:r>
-              <a:rPr lang="zh-TW" altLang="en-US" smtClean="0"/>
+              <a:rPr lang="zh-TW" altLang="en-US"/>
               <a:t>第三層</a:t>
             </a:r>
           </a:p>
           <a:p>
             <a:pPr lvl="3"/>
             <a:r>
-              <a:rPr lang="zh-TW" altLang="en-US" smtClean="0"/>
+              <a:rPr lang="zh-TW" altLang="en-US"/>
               <a:t>第四層</a:t>
             </a:r>
           </a:p>
           <a:p>
             <a:pPr lvl="4"/>
             <a:r>
-              <a:rPr lang="zh-TW" altLang="en-US" smtClean="0"/>
+              <a:rPr lang="zh-TW" altLang="en-US"/>
               <a:t>第五層</a:t>
             </a:r>
-            <a:endParaRPr lang="zh-TW" altLang="en-US"/>
           </a:p>
         </p:txBody>
       </p:sp>
@@ -1295,38 +1284,37 @@
           <a:p>
             <a:pPr lvl="0"/>
             <a:r>
-              <a:rPr lang="zh-TW" altLang="en-US" smtClean="0"/>
+              <a:rPr lang="zh-TW" altLang="en-US"/>
               <a:t>按一下以編輯母片文字樣式</a:t>
             </a:r>
           </a:p>
           <a:p>
             <a:pPr lvl="1"/>
             <a:r>
-              <a:rPr lang="zh-TW" altLang="en-US" smtClean="0"/>
+              <a:rPr lang="zh-TW" altLang="en-US"/>
               <a:t>第二層</a:t>
             </a:r>
           </a:p>
           <a:p>
             <a:pPr lvl="2"/>
             <a:r>
-              <a:rPr lang="zh-TW" altLang="en-US" smtClean="0"/>
+              <a:rPr lang="zh-TW" altLang="en-US"/>
               <a:t>第三層</a:t>
             </a:r>
           </a:p>
           <a:p>
             <a:pPr lvl="3"/>
             <a:r>
-              <a:rPr lang="zh-TW" altLang="en-US" smtClean="0"/>
+              <a:rPr lang="zh-TW" altLang="en-US"/>
               <a:t>第四層</a:t>
             </a:r>
           </a:p>
           <a:p>
             <a:pPr lvl="4"/>
             <a:r>
-              <a:rPr lang="zh-TW" altLang="en-US" smtClean="0"/>
+              <a:rPr lang="zh-TW" altLang="en-US"/>
               <a:t>第五層</a:t>
             </a:r>
-            <a:endParaRPr lang="zh-TW" altLang="en-US"/>
           </a:p>
         </p:txBody>
       </p:sp>
@@ -1348,7 +1336,7 @@
             <a:fld id="{ABF365F4-0254-40A2-88B3-76823A851626}" type="datetimeFigureOut">
               <a:rPr lang="zh-TW" altLang="en-US" smtClean="0"/>
               <a:pPr/>
-              <a:t>2023/5/20</a:t>
+              <a:t>2025/8/2</a:t>
             </a:fld>
             <a:endParaRPr lang="zh-TW" altLang="en-US"/>
           </a:p>
@@ -1442,10 +1430,9 @@
           </a:lstStyle>
           <a:p>
             <a:r>
-              <a:rPr lang="zh-TW" altLang="en-US" smtClean="0"/>
+              <a:rPr lang="zh-TW" altLang="en-US"/>
               <a:t>按一下以編輯母片標題樣式</a:t>
             </a:r>
-            <a:endParaRPr lang="zh-TW" altLang="en-US"/>
           </a:p>
         </p:txBody>
       </p:sp>
@@ -1508,7 +1495,7 @@
           <a:p>
             <a:pPr lvl="0"/>
             <a:r>
-              <a:rPr lang="zh-TW" altLang="en-US" smtClean="0"/>
+              <a:rPr lang="zh-TW" altLang="en-US"/>
               <a:t>按一下以編輯母片文字樣式</a:t>
             </a:r>
           </a:p>
@@ -1564,38 +1551,37 @@
           <a:p>
             <a:pPr lvl="0"/>
             <a:r>
-              <a:rPr lang="zh-TW" altLang="en-US" smtClean="0"/>
+              <a:rPr lang="zh-TW" altLang="en-US"/>
               <a:t>按一下以編輯母片文字樣式</a:t>
             </a:r>
           </a:p>
           <a:p>
             <a:pPr lvl="1"/>
             <a:r>
-              <a:rPr lang="zh-TW" altLang="en-US" smtClean="0"/>
+              <a:rPr lang="zh-TW" altLang="en-US"/>
               <a:t>第二層</a:t>
             </a:r>
           </a:p>
           <a:p>
             <a:pPr lvl="2"/>
             <a:r>
-              <a:rPr lang="zh-TW" altLang="en-US" smtClean="0"/>
+              <a:rPr lang="zh-TW" altLang="en-US"/>
               <a:t>第三層</a:t>
             </a:r>
           </a:p>
           <a:p>
             <a:pPr lvl="3"/>
             <a:r>
-              <a:rPr lang="zh-TW" altLang="en-US" smtClean="0"/>
+              <a:rPr lang="zh-TW" altLang="en-US"/>
               <a:t>第四層</a:t>
             </a:r>
           </a:p>
           <a:p>
             <a:pPr lvl="4"/>
             <a:r>
-              <a:rPr lang="zh-TW" altLang="en-US" smtClean="0"/>
+              <a:rPr lang="zh-TW" altLang="en-US"/>
               <a:t>第五層</a:t>
             </a:r>
-            <a:endParaRPr lang="zh-TW" altLang="en-US"/>
           </a:p>
         </p:txBody>
       </p:sp>
@@ -1658,7 +1644,7 @@
           <a:p>
             <a:pPr lvl="0"/>
             <a:r>
-              <a:rPr lang="zh-TW" altLang="en-US" smtClean="0"/>
+              <a:rPr lang="zh-TW" altLang="en-US"/>
               <a:t>按一下以編輯母片文字樣式</a:t>
             </a:r>
           </a:p>
@@ -1714,38 +1700,37 @@
           <a:p>
             <a:pPr lvl="0"/>
             <a:r>
-              <a:rPr lang="zh-TW" altLang="en-US" smtClean="0"/>
+              <a:rPr lang="zh-TW" altLang="en-US"/>
               <a:t>按一下以編輯母片文字樣式</a:t>
             </a:r>
           </a:p>
           <a:p>
             <a:pPr lvl="1"/>
             <a:r>
-              <a:rPr lang="zh-TW" altLang="en-US" smtClean="0"/>
+              <a:rPr lang="zh-TW" altLang="en-US"/>
               <a:t>第二層</a:t>
             </a:r>
           </a:p>
           <a:p>
             <a:pPr lvl="2"/>
             <a:r>
-              <a:rPr lang="zh-TW" altLang="en-US" smtClean="0"/>
+              <a:rPr lang="zh-TW" altLang="en-US"/>
               <a:t>第三層</a:t>
             </a:r>
           </a:p>
           <a:p>
             <a:pPr lvl="3"/>
             <a:r>
-              <a:rPr lang="zh-TW" altLang="en-US" smtClean="0"/>
+              <a:rPr lang="zh-TW" altLang="en-US"/>
               <a:t>第四層</a:t>
             </a:r>
           </a:p>
           <a:p>
             <a:pPr lvl="4"/>
             <a:r>
-              <a:rPr lang="zh-TW" altLang="en-US" smtClean="0"/>
+              <a:rPr lang="zh-TW" altLang="en-US"/>
               <a:t>第五層</a:t>
             </a:r>
-            <a:endParaRPr lang="zh-TW" altLang="en-US"/>
           </a:p>
         </p:txBody>
       </p:sp>
@@ -1767,7 +1752,7 @@
             <a:fld id="{ABF365F4-0254-40A2-88B3-76823A851626}" type="datetimeFigureOut">
               <a:rPr lang="zh-TW" altLang="en-US" smtClean="0"/>
               <a:pPr/>
-              <a:t>2023/5/20</a:t>
+              <a:t>2025/8/2</a:t>
             </a:fld>
             <a:endParaRPr lang="zh-TW" altLang="en-US"/>
           </a:p>
@@ -1857,10 +1842,9 @@
           <a:lstStyle/>
           <a:p>
             <a:r>
-              <a:rPr lang="zh-TW" altLang="en-US" smtClean="0"/>
+              <a:rPr lang="zh-TW" altLang="en-US"/>
               <a:t>按一下以編輯母片標題樣式</a:t>
             </a:r>
-            <a:endParaRPr lang="zh-TW" altLang="en-US"/>
           </a:p>
         </p:txBody>
       </p:sp>
@@ -1882,7 +1866,7 @@
             <a:fld id="{ABF365F4-0254-40A2-88B3-76823A851626}" type="datetimeFigureOut">
               <a:rPr lang="zh-TW" altLang="en-US" smtClean="0"/>
               <a:pPr/>
-              <a:t>2023/5/20</a:t>
+              <a:t>2025/8/2</a:t>
             </a:fld>
             <a:endParaRPr lang="zh-TW" altLang="en-US"/>
           </a:p>
@@ -1974,7 +1958,7 @@
             <a:fld id="{ABF365F4-0254-40A2-88B3-76823A851626}" type="datetimeFigureOut">
               <a:rPr lang="zh-TW" altLang="en-US" smtClean="0"/>
               <a:pPr/>
-              <a:t>2023/5/20</a:t>
+              <a:t>2025/8/2</a:t>
             </a:fld>
             <a:endParaRPr lang="zh-TW" altLang="en-US"/>
           </a:p>
@@ -2073,10 +2057,9 @@
           </a:lstStyle>
           <a:p>
             <a:r>
-              <a:rPr lang="zh-TW" altLang="en-US" smtClean="0"/>
+              <a:rPr lang="zh-TW" altLang="en-US"/>
               <a:t>按一下以編輯母片標題樣式</a:t>
             </a:r>
-            <a:endParaRPr lang="zh-TW" altLang="en-US"/>
           </a:p>
         </p:txBody>
       </p:sp>
@@ -2130,38 +2113,37 @@
           <a:p>
             <a:pPr lvl="0"/>
             <a:r>
-              <a:rPr lang="zh-TW" altLang="en-US" smtClean="0"/>
+              <a:rPr lang="zh-TW" altLang="en-US"/>
               <a:t>按一下以編輯母片文字樣式</a:t>
             </a:r>
           </a:p>
           <a:p>
             <a:pPr lvl="1"/>
             <a:r>
-              <a:rPr lang="zh-TW" altLang="en-US" smtClean="0"/>
+              <a:rPr lang="zh-TW" altLang="en-US"/>
               <a:t>第二層</a:t>
             </a:r>
           </a:p>
           <a:p>
             <a:pPr lvl="2"/>
             <a:r>
-              <a:rPr lang="zh-TW" altLang="en-US" smtClean="0"/>
+              <a:rPr lang="zh-TW" altLang="en-US"/>
               <a:t>第三層</a:t>
             </a:r>
           </a:p>
           <a:p>
             <a:pPr lvl="3"/>
             <a:r>
-              <a:rPr lang="zh-TW" altLang="en-US" smtClean="0"/>
+              <a:rPr lang="zh-TW" altLang="en-US"/>
               <a:t>第四層</a:t>
             </a:r>
           </a:p>
           <a:p>
             <a:pPr lvl="4"/>
             <a:r>
-              <a:rPr lang="zh-TW" altLang="en-US" smtClean="0"/>
+              <a:rPr lang="zh-TW" altLang="en-US"/>
               <a:t>第五層</a:t>
             </a:r>
-            <a:endParaRPr lang="zh-TW" altLang="en-US"/>
           </a:p>
         </p:txBody>
       </p:sp>
@@ -2224,7 +2206,7 @@
           <a:p>
             <a:pPr lvl="0"/>
             <a:r>
-              <a:rPr lang="zh-TW" altLang="en-US" smtClean="0"/>
+              <a:rPr lang="zh-TW" altLang="en-US"/>
               <a:t>按一下以編輯母片文字樣式</a:t>
             </a:r>
           </a:p>
@@ -2248,7 +2230,7 @@
             <a:fld id="{ABF365F4-0254-40A2-88B3-76823A851626}" type="datetimeFigureOut">
               <a:rPr lang="zh-TW" altLang="en-US" smtClean="0"/>
               <a:pPr/>
-              <a:t>2023/5/20</a:t>
+              <a:t>2025/8/2</a:t>
             </a:fld>
             <a:endParaRPr lang="zh-TW" altLang="en-US"/>
           </a:p>
@@ -2347,10 +2329,9 @@
           </a:lstStyle>
           <a:p>
             <a:r>
-              <a:rPr lang="zh-TW" altLang="en-US" smtClean="0"/>
+              <a:rPr lang="zh-TW" altLang="en-US"/>
               <a:t>按一下以編輯母片標題樣式</a:t>
             </a:r>
-            <a:endParaRPr lang="zh-TW" altLang="en-US"/>
           </a:p>
         </p:txBody>
       </p:sp>
@@ -2412,10 +2393,9 @@
           </a:lstStyle>
           <a:p>
             <a:r>
-              <a:rPr lang="zh-TW" altLang="en-US" smtClean="0"/>
+              <a:rPr lang="zh-TW" altLang="en-US"/>
               <a:t>按一下圖示以新增圖片</a:t>
             </a:r>
-            <a:endParaRPr lang="zh-TW" altLang="en-US"/>
           </a:p>
         </p:txBody>
       </p:sp>
@@ -2478,7 +2458,7 @@
           <a:p>
             <a:pPr lvl="0"/>
             <a:r>
-              <a:rPr lang="zh-TW" altLang="en-US" smtClean="0"/>
+              <a:rPr lang="zh-TW" altLang="en-US"/>
               <a:t>按一下以編輯母片文字樣式</a:t>
             </a:r>
           </a:p>
@@ -2502,7 +2482,7 @@
             <a:fld id="{ABF365F4-0254-40A2-88B3-76823A851626}" type="datetimeFigureOut">
               <a:rPr lang="zh-TW" altLang="en-US" smtClean="0"/>
               <a:pPr/>
-              <a:t>2023/5/20</a:t>
+              <a:t>2025/8/2</a:t>
             </a:fld>
             <a:endParaRPr lang="zh-TW" altLang="en-US"/>
           </a:p>
@@ -2612,10 +2592,9 @@
           <a:lstStyle/>
           <a:p>
             <a:r>
-              <a:rPr lang="zh-TW" altLang="en-US" smtClean="0"/>
+              <a:rPr lang="zh-TW" altLang="en-US"/>
               <a:t>按一下以編輯母片標題樣式</a:t>
             </a:r>
-            <a:endParaRPr lang="zh-TW" altLang="en-US"/>
           </a:p>
         </p:txBody>
       </p:sp>
@@ -2646,38 +2625,37 @@
           <a:p>
             <a:pPr lvl="0"/>
             <a:r>
-              <a:rPr lang="zh-TW" altLang="en-US" smtClean="0"/>
+              <a:rPr lang="zh-TW" altLang="en-US"/>
               <a:t>按一下以編輯母片文字樣式</a:t>
             </a:r>
           </a:p>
           <a:p>
             <a:pPr lvl="1"/>
             <a:r>
-              <a:rPr lang="zh-TW" altLang="en-US" smtClean="0"/>
+              <a:rPr lang="zh-TW" altLang="en-US"/>
               <a:t>第二層</a:t>
             </a:r>
           </a:p>
           <a:p>
             <a:pPr lvl="2"/>
             <a:r>
-              <a:rPr lang="zh-TW" altLang="en-US" smtClean="0"/>
+              <a:rPr lang="zh-TW" altLang="en-US"/>
               <a:t>第三層</a:t>
             </a:r>
           </a:p>
           <a:p>
             <a:pPr lvl="3"/>
             <a:r>
-              <a:rPr lang="zh-TW" altLang="en-US" smtClean="0"/>
+              <a:rPr lang="zh-TW" altLang="en-US"/>
               <a:t>第四層</a:t>
             </a:r>
           </a:p>
           <a:p>
             <a:pPr lvl="4"/>
             <a:r>
-              <a:rPr lang="zh-TW" altLang="en-US" smtClean="0"/>
+              <a:rPr lang="zh-TW" altLang="en-US"/>
               <a:t>第五層</a:t>
             </a:r>
-            <a:endParaRPr lang="zh-TW" altLang="en-US"/>
           </a:p>
         </p:txBody>
       </p:sp>
@@ -2717,7 +2695,7 @@
             <a:fld id="{ABF365F4-0254-40A2-88B3-76823A851626}" type="datetimeFigureOut">
               <a:rPr lang="zh-TW" altLang="en-US" smtClean="0"/>
               <a:pPr/>
-              <a:t>2023/5/20</a:t>
+              <a:t>2025/8/2</a:t>
             </a:fld>
             <a:endParaRPr lang="zh-TW" altLang="en-US"/>
           </a:p>
@@ -3111,7 +3089,7 @@
           <a:lstStyle/>
           <a:p>
             <a:r>
-              <a:rPr lang="zh-CN" altLang="en-US" sz="5400" b="1" i="1" dirty="0" smtClean="0">
+              <a:rPr lang="zh-CN" altLang="en-US" sz="5400" b="1" i="1" dirty="0">
                 <a:solidFill>
                   <a:srgbClr val="000066"/>
                 </a:solidFill>
@@ -3125,24 +3103,7 @@
                 <a:latin typeface="微軟正黑體" pitchFamily="34" charset="-120"/>
                 <a:ea typeface="微軟正黑體" pitchFamily="34" charset="-120"/>
               </a:rPr>
-              <a:t>充</a:t>
-            </a:r>
-            <a:r>
-              <a:rPr lang="zh-CN" altLang="en-US" sz="5400" b="1" i="1" dirty="0">
-                <a:solidFill>
-                  <a:srgbClr val="000066"/>
-                </a:solidFill>
-                <a:effectLst>
-                  <a:outerShdw blurRad="38100" dist="38100" dir="2700000" algn="tl">
-                    <a:srgbClr val="000000">
-                      <a:alpha val="43137"/>
-                    </a:srgbClr>
-                  </a:outerShdw>
-                </a:effectLst>
-                <a:latin typeface="微軟正黑體" pitchFamily="34" charset="-120"/>
-                <a:ea typeface="微軟正黑體" pitchFamily="34" charset="-120"/>
-              </a:rPr>
-              <a:t>滿我</a:t>
+              <a:t>充滿我</a:t>
             </a:r>
             <a:endParaRPr lang="zh-TW" altLang="en-US" sz="5400" b="1" i="1" dirty="0">
               <a:solidFill>
@@ -3224,77 +3185,37 @@
                 <a:latin typeface="微軟正黑體" pitchFamily="34" charset="-120"/>
                 <a:ea typeface="微軟正黑體" pitchFamily="34" charset="-120"/>
               </a:rPr>
-              <a:t>我的</a:t>
-            </a:r>
-            <a:r>
-              <a:rPr lang="zh-TW" altLang="en-US" sz="4800" b="1" dirty="0" smtClean="0">
+              <a:t>我的心唯有</a:t>
+            </a:r>
+            <a:r>
+              <a:rPr lang="zh-CN" altLang="en-US" sz="4800" b="1" dirty="0">
                 <a:solidFill>
                   <a:srgbClr val="000066"/>
                 </a:solidFill>
                 <a:latin typeface="微軟正黑體" pitchFamily="34" charset="-120"/>
                 <a:ea typeface="微軟正黑體" pitchFamily="34" charset="-120"/>
               </a:rPr>
-              <a:t>心唯</a:t>
-            </a:r>
-            <a:r>
-              <a:rPr lang="zh-TW" altLang="en-US" sz="4800" b="1" dirty="0">
+              <a:t>祢</a:t>
+            </a:r>
+            <a:r>
+              <a:rPr lang="en-US" altLang="zh-TW" sz="4800" b="1" dirty="0">
                 <a:solidFill>
                   <a:srgbClr val="000066"/>
                 </a:solidFill>
                 <a:latin typeface="微軟正黑體" pitchFamily="34" charset="-120"/>
                 <a:ea typeface="微軟正黑體" pitchFamily="34" charset="-120"/>
               </a:rPr>
-              <a:t>有</a:t>
-            </a:r>
-            <a:r>
-              <a:rPr lang="zh-CN" altLang="en-US" sz="4800" b="1" dirty="0">
+              <a:t>  </a:t>
+            </a:r>
+            <a:r>
+              <a:rPr lang="zh-TW" altLang="en-US" sz="4800" b="1" dirty="0">
                 <a:solidFill>
                   <a:srgbClr val="000066"/>
                 </a:solidFill>
                 <a:latin typeface="微軟正黑體" pitchFamily="34" charset="-120"/>
                 <a:ea typeface="微軟正黑體" pitchFamily="34" charset="-120"/>
               </a:rPr>
-              <a:t>祢</a:t>
-            </a:r>
-            <a:r>
-              <a:rPr lang="en-US" altLang="zh-TW" sz="4800" b="1" dirty="0">
-                <a:solidFill>
-                  <a:srgbClr val="000066"/>
-                </a:solidFill>
-                <a:latin typeface="微軟正黑體" pitchFamily="34" charset="-120"/>
-                <a:ea typeface="微軟正黑體" pitchFamily="34" charset="-120"/>
-              </a:rPr>
-              <a:t>  </a:t>
-            </a:r>
-            <a:r>
-              <a:rPr lang="zh-TW" altLang="en-US" sz="4800" b="1" dirty="0">
-                <a:solidFill>
-                  <a:srgbClr val="000066"/>
-                </a:solidFill>
-                <a:latin typeface="微軟正黑體" pitchFamily="34" charset="-120"/>
-                <a:ea typeface="微軟正黑體" pitchFamily="34" charset="-120"/>
-              </a:rPr>
-              <a:t>我的</a:t>
-            </a:r>
-            <a:r>
-              <a:rPr lang="zh-TW" altLang="en-US" sz="4800" b="1" dirty="0" smtClean="0">
-                <a:solidFill>
-                  <a:srgbClr val="000066"/>
-                </a:solidFill>
-                <a:latin typeface="微軟正黑體" pitchFamily="34" charset="-120"/>
-                <a:ea typeface="微軟正黑體" pitchFamily="34" charset="-120"/>
-              </a:rPr>
-              <a:t>靈渴</a:t>
-            </a:r>
-            <a:r>
-              <a:rPr lang="zh-TW" altLang="en-US" sz="4800" b="1" dirty="0">
-                <a:solidFill>
-                  <a:srgbClr val="000066"/>
-                </a:solidFill>
-                <a:latin typeface="微軟正黑體" pitchFamily="34" charset="-120"/>
-                <a:ea typeface="微軟正黑體" pitchFamily="34" charset="-120"/>
-              </a:rPr>
-              <a:t>慕</a:t>
+              <a:t>我的靈渴慕</a:t>
             </a:r>
             <a:r>
               <a:rPr lang="zh-CN" altLang="en-US" sz="4800" b="1" dirty="0">
@@ -3326,17 +3247,17 @@
                 <a:latin typeface="微軟正黑體" pitchFamily="34" charset="-120"/>
                 <a:ea typeface="微軟正黑體" pitchFamily="34" charset="-120"/>
               </a:rPr>
-              <a:t>我全</a:t>
-            </a:r>
-            <a:r>
-              <a:rPr lang="zh-TW" altLang="en-US" sz="4800" b="1" dirty="0" smtClean="0">
+              <a:t>我全人獻給</a:t>
+            </a:r>
+            <a:r>
+              <a:rPr lang="zh-CN" altLang="en-US" sz="4800" b="1" dirty="0">
                 <a:solidFill>
                   <a:srgbClr val="000066"/>
                 </a:solidFill>
                 <a:latin typeface="微軟正黑體" pitchFamily="34" charset="-120"/>
                 <a:ea typeface="微軟正黑體" pitchFamily="34" charset="-120"/>
               </a:rPr>
-              <a:t>人獻</a:t>
+              <a:t>祢  </a:t>
             </a:r>
             <a:r>
               <a:rPr lang="zh-TW" altLang="en-US" sz="4800" b="1" dirty="0">
@@ -3346,47 +3267,7 @@
                 <a:latin typeface="微軟正黑體" pitchFamily="34" charset="-120"/>
                 <a:ea typeface="微軟正黑體" pitchFamily="34" charset="-120"/>
               </a:rPr>
-              <a:t>給</a:t>
-            </a:r>
-            <a:r>
-              <a:rPr lang="zh-CN" altLang="en-US" sz="4800" b="1" dirty="0">
-                <a:solidFill>
-                  <a:srgbClr val="000066"/>
-                </a:solidFill>
-                <a:latin typeface="微軟正黑體" pitchFamily="34" charset="-120"/>
-                <a:ea typeface="微軟正黑體" pitchFamily="34" charset="-120"/>
-              </a:rPr>
-              <a:t>祢  </a:t>
-            </a:r>
-            <a:r>
-              <a:rPr lang="zh-TW" altLang="en-US" sz="4800" b="1" dirty="0">
-                <a:solidFill>
-                  <a:srgbClr val="000066"/>
-                </a:solidFill>
-                <a:latin typeface="微軟正黑體" pitchFamily="34" charset="-120"/>
-                <a:ea typeface="微軟正黑體" pitchFamily="34" charset="-120"/>
-              </a:rPr>
-              <a:t>以全</a:t>
-            </a:r>
-            <a:r>
-              <a:rPr lang="zh-TW" altLang="en-US" sz="4800" b="1" dirty="0" smtClean="0">
-                <a:solidFill>
-                  <a:srgbClr val="000066"/>
-                </a:solidFill>
-                <a:latin typeface="微軟正黑體" pitchFamily="34" charset="-120"/>
-                <a:ea typeface="微軟正黑體" pitchFamily="34" charset="-120"/>
-              </a:rPr>
-              <a:t>心讚</a:t>
-            </a:r>
-            <a:r>
-              <a:rPr lang="zh-TW" altLang="en-US" sz="4800" b="1" dirty="0">
-                <a:solidFill>
-                  <a:srgbClr val="000066"/>
-                </a:solidFill>
-                <a:latin typeface="微軟正黑體" pitchFamily="34" charset="-120"/>
-                <a:ea typeface="微軟正黑體" pitchFamily="34" charset="-120"/>
-              </a:rPr>
-              <a:t>美</a:t>
+              <a:t>以全心讚美</a:t>
             </a:r>
             <a:r>
               <a:rPr lang="zh-CN" altLang="en-US" sz="4800" b="1" dirty="0">
@@ -3432,7 +3313,7 @@
           <a:p>
             <a:pPr algn="ctr"/>
             <a:r>
-              <a:rPr lang="en-US" sz="2800" b="1" dirty="0" smtClean="0">
+              <a:rPr lang="en-US" sz="2800" b="1" dirty="0">
                 <a:solidFill>
                   <a:srgbClr val="000066"/>
                 </a:solidFill>
@@ -3442,17 +3323,17 @@
               <a:t>( </a:t>
             </a:r>
             <a:r>
-              <a:rPr lang="zh-CN" altLang="en-US" sz="2800" b="1" dirty="0" smtClean="0">
+              <a:rPr lang="zh-CN" altLang="en-US" sz="2800" b="1" dirty="0">
                 <a:solidFill>
                   <a:srgbClr val="000066"/>
                 </a:solidFill>
                 <a:latin typeface="Microsoft JhengHei" panose="020B0604030504040204" pitchFamily="34" charset="-120"/>
                 <a:ea typeface="Microsoft JhengHei" panose="020B0604030504040204" pitchFamily="34" charset="-120"/>
               </a:rPr>
-              <a:t>正</a:t>
-            </a:r>
-            <a:r>
-              <a:rPr lang="en-US" sz="2800" b="1" dirty="0" smtClean="0">
+              <a:t>正歌</a:t>
+            </a:r>
+            <a:r>
+              <a:rPr lang="en-US" sz="2800" b="1" dirty="0">
                 <a:solidFill>
                   <a:srgbClr val="000066"/>
                 </a:solidFill>
@@ -3533,17 +3414,17 @@
                 <a:latin typeface="微軟正黑體" pitchFamily="34" charset="-120"/>
                 <a:ea typeface="微軟正黑體" pitchFamily="34" charset="-120"/>
               </a:rPr>
-              <a:t>舉雙</a:t>
-            </a:r>
-            <a:r>
-              <a:rPr lang="zh-TW" altLang="en-US" sz="4800" b="1" dirty="0" smtClean="0">
+              <a:t>舉雙手敬拜</a:t>
+            </a:r>
+            <a:r>
+              <a:rPr lang="zh-CN" altLang="en-US" sz="4800" b="1" dirty="0">
                 <a:solidFill>
                   <a:srgbClr val="000066"/>
                 </a:solidFill>
                 <a:latin typeface="微軟正黑體" pitchFamily="34" charset="-120"/>
                 <a:ea typeface="微軟正黑體" pitchFamily="34" charset="-120"/>
               </a:rPr>
-              <a:t>手敬</a:t>
+              <a:t>祢  </a:t>
             </a:r>
             <a:r>
               <a:rPr lang="zh-TW" altLang="en-US" sz="4800" b="1" dirty="0">
@@ -3553,47 +3434,7 @@
                 <a:latin typeface="微軟正黑體" pitchFamily="34" charset="-120"/>
                 <a:ea typeface="微軟正黑體" pitchFamily="34" charset="-120"/>
               </a:rPr>
-              <a:t>拜</a:t>
-            </a:r>
-            <a:r>
-              <a:rPr lang="zh-CN" altLang="en-US" sz="4800" b="1" dirty="0">
-                <a:solidFill>
-                  <a:srgbClr val="000066"/>
-                </a:solidFill>
-                <a:latin typeface="微軟正黑體" pitchFamily="34" charset="-120"/>
-                <a:ea typeface="微軟正黑體" pitchFamily="34" charset="-120"/>
-              </a:rPr>
-              <a:t>祢  </a:t>
-            </a:r>
-            <a:r>
-              <a:rPr lang="zh-TW" altLang="en-US" sz="4800" b="1" dirty="0">
-                <a:solidFill>
-                  <a:srgbClr val="000066"/>
-                </a:solidFill>
-                <a:latin typeface="微軟正黑體" pitchFamily="34" charset="-120"/>
-                <a:ea typeface="微軟正黑體" pitchFamily="34" charset="-120"/>
-              </a:rPr>
-              <a:t>深深</a:t>
-            </a:r>
-            <a:r>
-              <a:rPr lang="zh-TW" altLang="en-US" sz="4800" b="1" dirty="0" smtClean="0">
-                <a:solidFill>
-                  <a:srgbClr val="000066"/>
-                </a:solidFill>
-                <a:latin typeface="微軟正黑體" pitchFamily="34" charset="-120"/>
-                <a:ea typeface="微軟正黑體" pitchFamily="34" charset="-120"/>
-              </a:rPr>
-              <a:t>說我</a:t>
-            </a:r>
-            <a:r>
-              <a:rPr lang="zh-TW" altLang="en-US" sz="4800" b="1" dirty="0">
-                <a:solidFill>
-                  <a:srgbClr val="000066"/>
-                </a:solidFill>
-                <a:latin typeface="微軟正黑體" pitchFamily="34" charset="-120"/>
-                <a:ea typeface="微軟正黑體" pitchFamily="34" charset="-120"/>
-              </a:rPr>
-              <a:t>愛</a:t>
+              <a:t>深深說我愛</a:t>
             </a:r>
             <a:r>
               <a:rPr lang="zh-CN" altLang="en-US" sz="4800" b="1" dirty="0">
@@ -3625,17 +3466,17 @@
                 <a:latin typeface="微軟正黑體" pitchFamily="34" charset="-120"/>
                 <a:ea typeface="微軟正黑體" pitchFamily="34" charset="-120"/>
               </a:rPr>
-              <a:t>我的</a:t>
-            </a:r>
-            <a:r>
-              <a:rPr lang="zh-TW" altLang="en-US" sz="4800" b="1" dirty="0" smtClean="0">
+              <a:t>我的神我的主</a:t>
+            </a:r>
+            <a:r>
+              <a:rPr lang="en-US" altLang="zh-TW" sz="4800" b="1" dirty="0">
                 <a:solidFill>
                   <a:srgbClr val="000066"/>
                 </a:solidFill>
                 <a:latin typeface="微軟正黑體" pitchFamily="34" charset="-120"/>
                 <a:ea typeface="微軟正黑體" pitchFamily="34" charset="-120"/>
               </a:rPr>
-              <a:t>神我</a:t>
+              <a:t>  </a:t>
             </a:r>
             <a:r>
               <a:rPr lang="zh-TW" altLang="en-US" sz="4800" b="1" dirty="0">
@@ -3645,47 +3486,7 @@
                 <a:latin typeface="微軟正黑體" pitchFamily="34" charset="-120"/>
                 <a:ea typeface="微軟正黑體" pitchFamily="34" charset="-120"/>
               </a:rPr>
-              <a:t>的主</a:t>
-            </a:r>
-            <a:r>
-              <a:rPr lang="en-US" altLang="zh-TW" sz="4800" b="1" dirty="0">
-                <a:solidFill>
-                  <a:srgbClr val="000066"/>
-                </a:solidFill>
-                <a:latin typeface="微軟正黑體" pitchFamily="34" charset="-120"/>
-                <a:ea typeface="微軟正黑體" pitchFamily="34" charset="-120"/>
-              </a:rPr>
-              <a:t>  </a:t>
-            </a:r>
-            <a:r>
-              <a:rPr lang="zh-TW" altLang="en-US" sz="4800" b="1" dirty="0">
-                <a:solidFill>
-                  <a:srgbClr val="000066"/>
-                </a:solidFill>
-                <a:latin typeface="微軟正黑體" pitchFamily="34" charset="-120"/>
-                <a:ea typeface="微軟正黑體" pitchFamily="34" charset="-120"/>
-              </a:rPr>
-              <a:t>我渴</a:t>
-            </a:r>
-            <a:r>
-              <a:rPr lang="zh-TW" altLang="en-US" sz="4800" b="1" dirty="0" smtClean="0">
-                <a:solidFill>
-                  <a:srgbClr val="000066"/>
-                </a:solidFill>
-                <a:latin typeface="微軟正黑體" pitchFamily="34" charset="-120"/>
-                <a:ea typeface="微軟正黑體" pitchFamily="34" charset="-120"/>
-              </a:rPr>
-              <a:t>望親</a:t>
-            </a:r>
-            <a:r>
-              <a:rPr lang="zh-TW" altLang="en-US" sz="4800" b="1" dirty="0">
-                <a:solidFill>
-                  <a:srgbClr val="000066"/>
-                </a:solidFill>
-                <a:latin typeface="微軟正黑體" pitchFamily="34" charset="-120"/>
-                <a:ea typeface="微軟正黑體" pitchFamily="34" charset="-120"/>
-              </a:rPr>
-              <a:t>近</a:t>
+              <a:t>我渴望親近</a:t>
             </a:r>
             <a:r>
               <a:rPr lang="zh-CN" altLang="en-US" sz="4800" b="1" dirty="0">
@@ -3731,7 +3532,7 @@
           <a:p>
             <a:pPr algn="ctr"/>
             <a:r>
-              <a:rPr lang="en-US" sz="2800" b="1" dirty="0" smtClean="0">
+              <a:rPr lang="en-US" sz="2800" b="1" dirty="0">
                 <a:solidFill>
                   <a:srgbClr val="000066"/>
                 </a:solidFill>
@@ -3741,17 +3542,17 @@
               <a:t>( </a:t>
             </a:r>
             <a:r>
-              <a:rPr lang="zh-CN" altLang="en-US" sz="2800" b="1" dirty="0" smtClean="0">
+              <a:rPr lang="zh-CN" altLang="en-US" sz="2800" b="1" dirty="0">
                 <a:solidFill>
                   <a:srgbClr val="000066"/>
                 </a:solidFill>
                 <a:latin typeface="Microsoft JhengHei" panose="020B0604030504040204" pitchFamily="34" charset="-120"/>
                 <a:ea typeface="Microsoft JhengHei" panose="020B0604030504040204" pitchFamily="34" charset="-120"/>
               </a:rPr>
-              <a:t>正</a:t>
-            </a:r>
-            <a:r>
-              <a:rPr lang="en-US" sz="2800" b="1" dirty="0" smtClean="0">
+              <a:t>正歌</a:t>
+            </a:r>
+            <a:r>
+              <a:rPr lang="en-US" sz="2800" b="1" dirty="0">
                 <a:solidFill>
                   <a:srgbClr val="000066"/>
                 </a:solidFill>
@@ -3842,27 +3643,27 @@
                 <a:latin typeface="微軟正黑體" pitchFamily="34" charset="-120"/>
                 <a:ea typeface="微軟正黑體" pitchFamily="34" charset="-120"/>
               </a:rPr>
-              <a:t>滿</a:t>
-            </a:r>
-            <a:r>
-              <a:rPr lang="zh-CN" altLang="en-US" sz="4800" b="1" dirty="0" smtClean="0">
+              <a:t>滿我</a:t>
+            </a:r>
+            <a:r>
+              <a:rPr lang="zh-TW" altLang="en-US" sz="4800" b="1" dirty="0">
                 <a:solidFill>
                   <a:srgbClr val="000066"/>
                 </a:solidFill>
                 <a:latin typeface="微軟正黑體" pitchFamily="34" charset="-120"/>
                 <a:ea typeface="微軟正黑體" pitchFamily="34" charset="-120"/>
               </a:rPr>
-              <a:t>我</a:t>
-            </a:r>
-            <a:r>
-              <a:rPr lang="zh-TW" altLang="en-US" sz="4800" b="1" dirty="0" smtClean="0">
+              <a:t>  澆灌我 </a:t>
+            </a:r>
+            <a:r>
+              <a:rPr lang="en-US" altLang="zh-TW" sz="4800" b="1" dirty="0">
                 <a:solidFill>
                   <a:srgbClr val="000066"/>
                 </a:solidFill>
                 <a:latin typeface="微軟正黑體" pitchFamily="34" charset="-120"/>
                 <a:ea typeface="微軟正黑體" pitchFamily="34" charset="-120"/>
               </a:rPr>
-              <a:t>  澆</a:t>
+              <a:t> </a:t>
             </a:r>
             <a:r>
               <a:rPr lang="zh-TW" altLang="en-US" sz="4800" b="1" dirty="0">
@@ -3872,57 +3673,7 @@
                 <a:latin typeface="微軟正黑體" pitchFamily="34" charset="-120"/>
                 <a:ea typeface="微軟正黑體" pitchFamily="34" charset="-120"/>
               </a:rPr>
-              <a:t>灌</a:t>
-            </a:r>
-            <a:r>
-              <a:rPr lang="zh-TW" altLang="en-US" sz="4800" b="1" dirty="0" smtClean="0">
-                <a:solidFill>
-                  <a:srgbClr val="000066"/>
-                </a:solidFill>
-                <a:latin typeface="微軟正黑體" pitchFamily="34" charset="-120"/>
-                <a:ea typeface="微軟正黑體" pitchFamily="34" charset="-120"/>
-              </a:rPr>
-              <a:t>我 </a:t>
-            </a:r>
-            <a:r>
-              <a:rPr lang="en-US" altLang="zh-TW" sz="4800" b="1" dirty="0" smtClean="0">
-                <a:solidFill>
-                  <a:srgbClr val="000066"/>
-                </a:solidFill>
-                <a:latin typeface="微軟正黑體" pitchFamily="34" charset="-120"/>
-                <a:ea typeface="微軟正黑體" pitchFamily="34" charset="-120"/>
-              </a:rPr>
-              <a:t> </a:t>
-            </a:r>
-            <a:r>
-              <a:rPr lang="zh-TW" altLang="en-US" sz="4800" b="1" dirty="0">
-                <a:solidFill>
-                  <a:srgbClr val="000066"/>
-                </a:solidFill>
-                <a:latin typeface="微軟正黑體" pitchFamily="34" charset="-120"/>
-                <a:ea typeface="微軟正黑體" pitchFamily="34" charset="-120"/>
-              </a:rPr>
-              <a:t>使我</a:t>
-            </a:r>
-            <a:r>
-              <a:rPr lang="zh-TW" altLang="en-US" sz="4800" b="1" dirty="0" smtClean="0">
-                <a:solidFill>
-                  <a:srgbClr val="000066"/>
-                </a:solidFill>
-                <a:latin typeface="微軟正黑體" pitchFamily="34" charset="-120"/>
-                <a:ea typeface="微軟正黑體" pitchFamily="34" charset="-120"/>
-              </a:rPr>
-              <a:t>靈得</a:t>
-            </a:r>
-            <a:r>
-              <a:rPr lang="zh-TW" altLang="en-US" sz="4800" b="1" dirty="0">
-                <a:solidFill>
-                  <a:srgbClr val="000066"/>
-                </a:solidFill>
-                <a:latin typeface="微軟正黑體" pitchFamily="34" charset="-120"/>
-                <a:ea typeface="微軟正黑體" pitchFamily="34" charset="-120"/>
-              </a:rPr>
-              <a:t>滿溢</a:t>
+              <a:t>使我靈得滿溢</a:t>
             </a:r>
             <a:endParaRPr lang="en-US" altLang="zh-TW" sz="4800" b="1" dirty="0">
               <a:solidFill>
@@ -3944,17 +3695,17 @@
                 <a:latin typeface="微軟正黑體" pitchFamily="34" charset="-120"/>
                 <a:ea typeface="微軟正黑體" pitchFamily="34" charset="-120"/>
               </a:rPr>
-              <a:t>充滿我 </a:t>
-            </a:r>
-            <a:r>
-              <a:rPr lang="zh-TW" altLang="en-US" sz="4800" b="1" dirty="0" smtClean="0">
+              <a:t>充滿我  潔淨我</a:t>
+            </a:r>
+            <a:r>
+              <a:rPr lang="en-US" altLang="zh-TW" sz="4800" b="1" dirty="0">
                 <a:solidFill>
                   <a:srgbClr val="000066"/>
                 </a:solidFill>
                 <a:latin typeface="微軟正黑體" pitchFamily="34" charset="-120"/>
                 <a:ea typeface="微軟正黑體" pitchFamily="34" charset="-120"/>
               </a:rPr>
-              <a:t> 潔</a:t>
+              <a:t>  </a:t>
             </a:r>
             <a:r>
               <a:rPr lang="zh-TW" altLang="en-US" sz="4800" b="1" dirty="0">
@@ -3964,47 +3715,7 @@
                 <a:latin typeface="微軟正黑體" pitchFamily="34" charset="-120"/>
                 <a:ea typeface="微軟正黑體" pitchFamily="34" charset="-120"/>
               </a:rPr>
-              <a:t>淨我</a:t>
-            </a:r>
-            <a:r>
-              <a:rPr lang="en-US" altLang="zh-TW" sz="4800" b="1" dirty="0">
-                <a:solidFill>
-                  <a:srgbClr val="000066"/>
-                </a:solidFill>
-                <a:latin typeface="微軟正黑體" pitchFamily="34" charset="-120"/>
-                <a:ea typeface="微軟正黑體" pitchFamily="34" charset="-120"/>
-              </a:rPr>
-              <a:t> </a:t>
-            </a:r>
-            <a:r>
-              <a:rPr lang="en-US" altLang="zh-TW" sz="4800" b="1" dirty="0" smtClean="0">
-                <a:solidFill>
-                  <a:srgbClr val="000066"/>
-                </a:solidFill>
-                <a:latin typeface="微軟正黑體" pitchFamily="34" charset="-120"/>
-                <a:ea typeface="微軟正黑體" pitchFamily="34" charset="-120"/>
-              </a:rPr>
-              <a:t> </a:t>
-            </a:r>
-            <a:r>
-              <a:rPr lang="zh-TW" altLang="en-US" sz="4800" b="1" dirty="0" smtClean="0">
-                <a:solidFill>
-                  <a:srgbClr val="000066"/>
-                </a:solidFill>
-                <a:latin typeface="微軟正黑體" pitchFamily="34" charset="-120"/>
-                <a:ea typeface="微軟正黑體" pitchFamily="34" charset="-120"/>
-              </a:rPr>
-              <a:t>更</a:t>
-            </a:r>
-            <a:r>
-              <a:rPr lang="zh-TW" altLang="en-US" sz="4800" b="1" dirty="0">
-                <a:solidFill>
-                  <a:srgbClr val="000066"/>
-                </a:solidFill>
-                <a:latin typeface="微軟正黑體" pitchFamily="34" charset="-120"/>
-                <a:ea typeface="微軟正黑體" pitchFamily="34" charset="-120"/>
-              </a:rPr>
-              <a:t>新我</a:t>
+              <a:t>更新我</a:t>
             </a:r>
             <a:endParaRPr lang="en-US" altLang="zh-TW" sz="4800" b="1" dirty="0">
               <a:solidFill>
@@ -4040,7 +3751,7 @@
           <a:p>
             <a:pPr algn="ctr"/>
             <a:r>
-              <a:rPr lang="en-US" sz="2800" b="1" dirty="0" smtClean="0">
+              <a:rPr lang="en-US" sz="2800" b="1" dirty="0">
                 <a:solidFill>
                   <a:srgbClr val="000066"/>
                 </a:solidFill>
@@ -4050,34 +3761,24 @@
               <a:t>( </a:t>
             </a:r>
             <a:r>
-              <a:rPr lang="zh-CN" altLang="en-US" sz="2800" b="1" dirty="0" smtClean="0">
+              <a:rPr lang="zh-CN" altLang="en-US" sz="2800" b="1" dirty="0">
                 <a:solidFill>
                   <a:srgbClr val="000066"/>
                 </a:solidFill>
                 <a:latin typeface="Microsoft JhengHei" panose="020B0604030504040204" pitchFamily="34" charset="-120"/>
                 <a:ea typeface="Microsoft JhengHei" panose="020B0604030504040204" pitchFamily="34" charset="-120"/>
               </a:rPr>
-              <a:t>副</a:t>
-            </a:r>
-            <a:r>
-              <a:rPr lang="en-US" sz="2800" b="1" dirty="0" smtClean="0">
+              <a:t>副歌</a:t>
+            </a:r>
+            <a:r>
+              <a:rPr lang="en-US" sz="2800" b="1" dirty="0">
                 <a:solidFill>
                   <a:srgbClr val="000066"/>
                 </a:solidFill>
                 <a:latin typeface="Microsoft JhengHei" panose="020B0604030504040204" pitchFamily="34" charset="-120"/>
                 <a:ea typeface="Microsoft JhengHei" panose="020B0604030504040204" pitchFamily="34" charset="-120"/>
               </a:rPr>
-              <a:t> </a:t>
-            </a:r>
-            <a:r>
-              <a:rPr lang="en-US" sz="2800" b="1" dirty="0" smtClean="0">
-                <a:solidFill>
-                  <a:srgbClr val="000066"/>
-                </a:solidFill>
-                <a:latin typeface="Microsoft JhengHei" panose="020B0604030504040204" pitchFamily="34" charset="-120"/>
-                <a:ea typeface="Microsoft JhengHei" panose="020B0604030504040204" pitchFamily="34" charset="-120"/>
-              </a:rPr>
-              <a:t>)</a:t>
+              <a:t> )</a:t>
             </a:r>
             <a:endParaRPr lang="vi-VN" sz="2800" b="1" dirty="0">
               <a:solidFill>
@@ -4151,50 +3852,20 @@
                 <a:latin typeface="微軟正黑體" pitchFamily="34" charset="-120"/>
                 <a:ea typeface="微軟正黑體" pitchFamily="34" charset="-120"/>
               </a:rPr>
-              <a:t>充滿我 </a:t>
-            </a:r>
-            <a:r>
-              <a:rPr lang="zh-TW" altLang="en-US" sz="4800" b="1" dirty="0" smtClean="0">
+              <a:t>充滿我  滋潤我</a:t>
+            </a:r>
+            <a:r>
+              <a:rPr lang="en-US" altLang="zh-TW" sz="4800" b="1" dirty="0">
                 <a:solidFill>
                   <a:srgbClr val="000066"/>
                 </a:solidFill>
                 <a:latin typeface="微軟正黑體" pitchFamily="34" charset="-120"/>
                 <a:ea typeface="微軟正黑體" pitchFamily="34" charset="-120"/>
               </a:rPr>
-              <a:t> 滋</a:t>
+              <a:t>  </a:t>
             </a:r>
             <a:r>
               <a:rPr lang="zh-TW" altLang="en-US" sz="4800" b="1" dirty="0">
-                <a:solidFill>
-                  <a:srgbClr val="000066"/>
-                </a:solidFill>
-                <a:latin typeface="微軟正黑體" pitchFamily="34" charset="-120"/>
-                <a:ea typeface="微軟正黑體" pitchFamily="34" charset="-120"/>
-              </a:rPr>
-              <a:t>潤我</a:t>
-            </a:r>
-            <a:r>
-              <a:rPr lang="en-US" altLang="zh-TW" sz="4800" b="1" dirty="0">
-                <a:solidFill>
-                  <a:srgbClr val="000066"/>
-                </a:solidFill>
-                <a:latin typeface="微軟正黑體" pitchFamily="34" charset="-120"/>
-                <a:ea typeface="微軟正黑體" pitchFamily="34" charset="-120"/>
-              </a:rPr>
-              <a:t> </a:t>
-            </a:r>
-            <a:r>
-              <a:rPr lang="en-US" altLang="zh-TW" sz="4800" b="1" dirty="0" smtClean="0">
-                <a:solidFill>
-                  <a:srgbClr val="000066"/>
-                </a:solidFill>
-                <a:latin typeface="微軟正黑體" pitchFamily="34" charset="-120"/>
-                <a:ea typeface="微軟正黑體" pitchFamily="34" charset="-120"/>
-              </a:rPr>
-              <a:t> </a:t>
-            </a:r>
-            <a:r>
-              <a:rPr lang="zh-TW" altLang="en-US" sz="4800" b="1" dirty="0" smtClean="0">
                 <a:solidFill>
                   <a:srgbClr val="000066"/>
                 </a:solidFill>
@@ -4243,17 +3914,17 @@
                 <a:latin typeface="微軟正黑體" pitchFamily="34" charset="-120"/>
                 <a:ea typeface="微軟正黑體" pitchFamily="34" charset="-120"/>
               </a:rPr>
-              <a:t>我一生 </a:t>
-            </a:r>
-            <a:r>
-              <a:rPr lang="zh-TW" altLang="en-US" sz="4800" b="1" dirty="0" smtClean="0">
+              <a:t>我一生  我一世</a:t>
+            </a:r>
+            <a:r>
+              <a:rPr lang="en-US" altLang="zh-TW" sz="4800" b="1" dirty="0">
                 <a:solidFill>
                   <a:srgbClr val="000066"/>
                 </a:solidFill>
                 <a:latin typeface="微軟正黑體" pitchFamily="34" charset="-120"/>
                 <a:ea typeface="微軟正黑體" pitchFamily="34" charset="-120"/>
               </a:rPr>
-              <a:t> 我</a:t>
+              <a:t>  </a:t>
             </a:r>
             <a:r>
               <a:rPr lang="zh-TW" altLang="en-US" sz="4800" b="1" dirty="0">
@@ -4263,47 +3934,7 @@
                 <a:latin typeface="微軟正黑體" pitchFamily="34" charset="-120"/>
                 <a:ea typeface="微軟正黑體" pitchFamily="34" charset="-120"/>
               </a:rPr>
-              <a:t>一世</a:t>
-            </a:r>
-            <a:r>
-              <a:rPr lang="en-US" altLang="zh-TW" sz="4800" b="1" dirty="0">
-                <a:solidFill>
-                  <a:srgbClr val="000066"/>
-                </a:solidFill>
-                <a:latin typeface="微軟正黑體" pitchFamily="34" charset="-120"/>
-                <a:ea typeface="微軟正黑體" pitchFamily="34" charset="-120"/>
-              </a:rPr>
-              <a:t> </a:t>
-            </a:r>
-            <a:r>
-              <a:rPr lang="en-US" altLang="zh-TW" sz="4800" b="1" dirty="0" smtClean="0">
-                <a:solidFill>
-                  <a:srgbClr val="000066"/>
-                </a:solidFill>
-                <a:latin typeface="微軟正黑體" pitchFamily="34" charset="-120"/>
-                <a:ea typeface="微軟正黑體" pitchFamily="34" charset="-120"/>
-              </a:rPr>
-              <a:t> </a:t>
-            </a:r>
-            <a:r>
-              <a:rPr lang="zh-TW" altLang="en-US" sz="4800" b="1" dirty="0" smtClean="0">
-                <a:solidFill>
-                  <a:srgbClr val="000066"/>
-                </a:solidFill>
-                <a:latin typeface="微軟正黑體" pitchFamily="34" charset="-120"/>
-                <a:ea typeface="微軟正黑體" pitchFamily="34" charset="-120"/>
-              </a:rPr>
-              <a:t>屬</a:t>
-            </a:r>
-            <a:r>
-              <a:rPr lang="zh-TW" altLang="en-US" sz="4800" b="1" dirty="0">
-                <a:solidFill>
-                  <a:srgbClr val="000066"/>
-                </a:solidFill>
-                <a:latin typeface="微軟正黑體" pitchFamily="34" charset="-120"/>
-                <a:ea typeface="微軟正黑體" pitchFamily="34" charset="-120"/>
-              </a:rPr>
-              <a:t>於</a:t>
+              <a:t>屬於</a:t>
             </a:r>
             <a:r>
               <a:rPr lang="zh-CN" altLang="en-US" sz="4800" b="1" dirty="0">
@@ -4349,7 +3980,7 @@
           <a:p>
             <a:pPr algn="ctr"/>
             <a:r>
-              <a:rPr lang="en-US" sz="2800" b="1" dirty="0" smtClean="0">
+              <a:rPr lang="en-US" sz="2800" b="1" dirty="0">
                 <a:solidFill>
                   <a:srgbClr val="000066"/>
                 </a:solidFill>
@@ -4359,34 +3990,24 @@
               <a:t>( </a:t>
             </a:r>
             <a:r>
-              <a:rPr lang="zh-CN" altLang="en-US" sz="2800" b="1" smtClean="0">
+              <a:rPr lang="zh-CN" altLang="en-US" sz="2800" b="1" dirty="0">
                 <a:solidFill>
                   <a:srgbClr val="000066"/>
                 </a:solidFill>
                 <a:latin typeface="Microsoft JhengHei" panose="020B0604030504040204" pitchFamily="34" charset="-120"/>
                 <a:ea typeface="Microsoft JhengHei" panose="020B0604030504040204" pitchFamily="34" charset="-120"/>
               </a:rPr>
-              <a:t>副</a:t>
-            </a:r>
-            <a:r>
-              <a:rPr lang="en-US" sz="2800" b="1" smtClean="0">
+              <a:t>副歌</a:t>
+            </a:r>
+            <a:r>
+              <a:rPr lang="en-US" sz="2800" b="1" dirty="0">
                 <a:solidFill>
                   <a:srgbClr val="000066"/>
                 </a:solidFill>
                 <a:latin typeface="Microsoft JhengHei" panose="020B0604030504040204" pitchFamily="34" charset="-120"/>
                 <a:ea typeface="Microsoft JhengHei" panose="020B0604030504040204" pitchFamily="34" charset="-120"/>
               </a:rPr>
-              <a:t> </a:t>
-            </a:r>
-            <a:r>
-              <a:rPr lang="en-US" sz="2800" b="1" dirty="0" smtClean="0">
-                <a:solidFill>
-                  <a:srgbClr val="000066"/>
-                </a:solidFill>
-                <a:latin typeface="Microsoft JhengHei" panose="020B0604030504040204" pitchFamily="34" charset="-120"/>
-                <a:ea typeface="Microsoft JhengHei" panose="020B0604030504040204" pitchFamily="34" charset="-120"/>
-              </a:rPr>
-              <a:t>)</a:t>
+              <a:t> )</a:t>
             </a:r>
             <a:endParaRPr lang="vi-VN" sz="2800" b="1" dirty="0">
               <a:solidFill>
